--- a/IEP/t2-lesson4-exit-ticket-IEP-ANSWER-KEY.pptx
+++ b/IEP/t2-lesson4-exit-ticket-IEP-ANSWER-KEY.pptx
@@ -772,6 +772,40 @@
           </a:p>
         </p:txBody>
       </p:sp>
+      <p:sp>
+        <p:nvSpPr>
+          <p:cNvPr id="7" name="Slide Number 7"/>
+          <p:cNvSpPr txBox="1"/>
+          <p:nvPr/>
+        </p:nvSpPr>
+        <p:spPr>
+          <a:xfrm>
+            <a:off x="11277295" y="6611112"/>
+            <a:ext cx="685800" cy="201168"/>
+          </a:xfrm>
+          <a:prstGeom prst="rect">
+            <a:avLst/>
+          </a:prstGeom>
+          <a:noFill/>
+        </p:spPr>
+        <p:txBody>
+          <a:bodyPr wrap="none" lIns="0" tIns="0" rIns="0" bIns="0" anchor="b">
+            <a:noAutofit/>
+          </a:bodyPr>
+          <a:lstStyle/>
+          <a:p>
+            <a:pPr algn="r"/>
+            <a:fld id="{5C1A6E0B-3B1F-4D5E-9C7A-2F4B8D6E1A90}" type="slidenum">
+              <a:rPr lang="en-US" sz="1200" dirty="0">
+                <a:solidFill>
+                  <a:srgbClr val="5F6272"/>
+                </a:solidFill>
+              </a:rPr>
+              <a:t>1</a:t>
+            </a:fld>
+          </a:p>
+        </p:txBody>
+      </p:sp>
     </p:spTree>
   </p:cSld>
   <p:clrMapOvr>
@@ -1495,6 +1529,40 @@
               <a:t xml:space="preserve">Topic 2 Lesson 4 Exit Ticket · IEP Version · Answer Key (teacher copy)</a:t>
             </a:r>
             <a:endParaRPr lang="en-US" sz="1125" dirty="0"/>
+          </a:p>
+        </p:txBody>
+      </p:sp>
+      <p:sp>
+        <p:nvSpPr>
+          <p:cNvPr id="17" name="Slide Number 17"/>
+          <p:cNvSpPr txBox="1"/>
+          <p:nvPr/>
+        </p:nvSpPr>
+        <p:spPr>
+          <a:xfrm>
+            <a:off x="11277295" y="6611112"/>
+            <a:ext cx="685800" cy="201168"/>
+          </a:xfrm>
+          <a:prstGeom prst="rect">
+            <a:avLst/>
+          </a:prstGeom>
+          <a:noFill/>
+        </p:spPr>
+        <p:txBody>
+          <a:bodyPr wrap="none" lIns="0" tIns="0" rIns="0" bIns="0" anchor="b">
+            <a:noAutofit/>
+          </a:bodyPr>
+          <a:lstStyle/>
+          <a:p>
+            <a:pPr algn="r"/>
+            <a:fld id="{5C1A6E0B-3B1F-4D5E-9C7A-2F4B8D6E1A90}" type="slidenum">
+              <a:rPr lang="en-US" sz="1200" dirty="0">
+                <a:solidFill>
+                  <a:srgbClr val="5F6272"/>
+                </a:solidFill>
+              </a:rPr>
+              <a:t>2</a:t>
+            </a:fld>
           </a:p>
         </p:txBody>
       </p:sp>

--- a/IEP/t2-lesson4-exit-ticket-IEP-ANSWER-KEY.pptx
+++ b/IEP/t2-lesson4-exit-ticket-IEP-ANSWER-KEY.pptx
@@ -1443,7 +1443,7 @@
         <p:spPr>
           <a:xfrm>
             <a:off x="685800" y="4128516"/>
-            <a:ext cx="10820095" cy="534924"/>
+            <a:ext cx="10820095" cy="774954"/>
           </a:xfrm>
           <a:prstGeom prst="rect">
             <a:avLst/>
@@ -1482,7 +1482,7 @@
                 <a:latin typeface="Segoe UI"/>
                 <a:cs typeface="Segoe UI"/>
               </a:rPr>
-              <a:t xml:space="preserve"> 1. (9 − 1) ÷ (2 − 0) = 4. 2. Both slopes are 4, so the lines are parallel. 3. 50 is the y-intercept: the starting amount.</a:t>
+              <a:t xml:space="preserve"> 1. Change in y: 9 − 1 = 8. Change in x: 2 − 0 = 2. Divide: 8 ÷ 2 = 4. 2. The slope is the number with x: both are 4. Same slope means parallel. 3. In y = mx + b, 50 is b: the value when x = 0. x = 0 months is the start, so 50 is the $50 saved at the start.</a:t>
             </a:r>
             <a:endParaRPr lang="en-US" sz="1575" dirty="0"/>
           </a:p>
